--- a/Schools_ML_Track/camp_2026/slides/ML/ML07.pptx
+++ b/Schools_ML_Track/camp_2026/slides/ML/ML07.pptx
@@ -128,7 +128,7 @@
   <p:extLst>
     <p:ext uri="{521415D9-36F7-43E2-AB2F-B90AF26B5E84}">
       <p14:sectionLst xmlns:p14="http://schemas.microsoft.com/office/powerpoint/2010/main">
-        <p14:section name="Opening" id="{15734972-eba6-a3c6-1bbb-8377b92f518a}">
+        <p14:section name="Opening" id="{4efa5a53-2c55-627a-55a6-97a05b1c56e7}">
           <p14:sldIdLst>
             <p14:sldId id="256"/>
             <p14:sldId id="257"/>
@@ -139,7 +139,7 @@
             <p14:sldId id="262"/>
           </p14:sldIdLst>
         </p14:section>
-        <p14:section name="Block A" id="{d67587dd-b0a3-59e9-2407-db198cec57c1}">
+        <p14:section name="Block A" id="{f9be9843-8266-92de-5936-db125526a377}">
           <p14:sldIdLst>
             <p14:sldId id="263"/>
             <p14:sldId id="264"/>
@@ -149,15 +149,15 @@
             <p14:sldId id="269"/>
           </p14:sldIdLst>
         </p14:section>
-        <p14:section name="Break" id="{b147239e-452a-e96a-3001-9348352e68f8}">
+        <p14:section name="Break" id="{b7c64c52-4c8e-4562-3e20-53427f6056a0}">
           <p14:sldIdLst>
             <p14:sldId id="267"/>
           </p14:sldIdLst>
         </p14:section>
-        <p14:section name="Block A" id="{fd8dcb68-73b5-6d7e-5c62-4cbda7de0cae}">
+        <p14:section name="Block A" id="{72f92cdf-1903-58ee-e80b-983e669a1774}">
           <p14:sldIdLst/>
         </p14:section>
-        <p14:section name="Block B" id="{aa6c30aa-3b1e-c12b-9381-0e11ad8652be}">
+        <p14:section name="Block B" id="{9baaf54d-fc87-dcc4-999d-6e006d71cbbd}">
           <p14:sldIdLst>
             <p14:sldId id="270"/>
             <p14:sldId id="271"/>
@@ -166,7 +166,7 @@
             <p14:sldId id="274"/>
           </p14:sldIdLst>
         </p14:section>
-        <p14:section name="Make and close" id="{5f78477a-990b-05a9-05e3-64b0a7d71cc2}">
+        <p14:section name="Make and close" id="{3753c431-936c-c000-1999-11ffb8e41aa0}">
           <p14:sldIdLst>
             <p14:sldId id="275"/>
             <p14:sldId id="276"/>

--- a/Schools_ML_Track/camp_2026/slides/ML/ML07.pptx
+++ b/Schools_ML_Track/camp_2026/slides/ML/ML07.pptx
@@ -128,7 +128,7 @@
   <p:extLst>
     <p:ext uri="{521415D9-36F7-43E2-AB2F-B90AF26B5E84}">
       <p14:sectionLst xmlns:p14="http://schemas.microsoft.com/office/powerpoint/2010/main">
-        <p14:section name="Opening" id="{4efa5a53-2c55-627a-55a6-97a05b1c56e7}">
+        <p14:section name="Opening" id="{86da85c4-fb05-ddca-77c7-7129365d7484}">
           <p14:sldIdLst>
             <p14:sldId id="256"/>
             <p14:sldId id="257"/>
@@ -139,7 +139,7 @@
             <p14:sldId id="262"/>
           </p14:sldIdLst>
         </p14:section>
-        <p14:section name="Block A" id="{f9be9843-8266-92de-5936-db125526a377}">
+        <p14:section name="Block A" id="{3053f64f-e54d-8b0b-20e8-824158109bc0}">
           <p14:sldIdLst>
             <p14:sldId id="263"/>
             <p14:sldId id="264"/>
@@ -149,15 +149,15 @@
             <p14:sldId id="269"/>
           </p14:sldIdLst>
         </p14:section>
-        <p14:section name="Break" id="{b7c64c52-4c8e-4562-3e20-53427f6056a0}">
+        <p14:section name="Break" id="{415e1b22-256b-6f54-e318-03e3d3be40f3}">
           <p14:sldIdLst>
             <p14:sldId id="267"/>
           </p14:sldIdLst>
         </p14:section>
-        <p14:section name="Block A" id="{72f92cdf-1903-58ee-e80b-983e669a1774}">
+        <p14:section name="Block A" id="{019693e5-7ec6-9881-78ef-4d24e5f2d5d5}">
           <p14:sldIdLst/>
         </p14:section>
-        <p14:section name="Block B" id="{9baaf54d-fc87-dcc4-999d-6e006d71cbbd}">
+        <p14:section name="Block B" id="{68c61029-38dc-47df-c64e-4ed0de369dd0}">
           <p14:sldIdLst>
             <p14:sldId id="270"/>
             <p14:sldId id="271"/>
@@ -166,7 +166,7 @@
             <p14:sldId id="274"/>
           </p14:sldIdLst>
         </p14:section>
-        <p14:section name="Make and close" id="{3753c431-936c-c000-1999-11ffb8e41aa0}">
+        <p14:section name="Make and close" id="{b9247a83-cc4e-c093-b513-f7e4102593e3}">
           <p14:sldIdLst>
             <p14:sldId id="275"/>
             <p14:sldId id="276"/>
@@ -3647,474 +3647,30 @@
           </a:p>
         </p:txBody>
       </p:sp>
-      <p:sp>
-        <p:nvSpPr>
-          <p:cNvPr id="4" name="Shape 2"/>
-          <p:cNvSpPr/>
+      <p:pic>
+        <p:nvPicPr>
+          <p:cNvPr id="4" name="Image 0" descr="Change one thing">    </p:cNvPr>
+          <p:cNvPicPr>
+            <a:picLocks noChangeAspect="1"/>
+          </p:cNvPicPr>
           <p:nvPr/>
-        </p:nvSpPr>
-        <p:spPr>
-          <a:xfrm>
-            <a:off x="7223760" y="1737360"/>
-            <a:ext cx="4297680" cy="2981452"/>
-          </a:xfrm>
-          <a:prstGeom prst="roundRect">
-            <a:avLst>
-              <a:gd name="adj" fmla="val 2454"/>
-            </a:avLst>
-          </a:prstGeom>
-          <a:solidFill>
-            <a:srgbClr val="111111"/>
-          </a:solidFill>
-          <a:ln/>
-        </p:spPr>
-      </p:sp>
-      <p:sp>
-        <p:nvSpPr>
-          <p:cNvPr id="5" name="Text 3"/>
-          <p:cNvSpPr txBox="1"/>
-          <p:nvPr/>
-        </p:nvSpPr>
-        <p:spPr>
-          <a:xfrm>
-            <a:off x="7424928" y="1938528"/>
-            <a:ext cx="3895344" cy="2579116"/>
-          </a:xfrm>
-          <a:prstGeom prst="rect">
-            <a:avLst/>
-          </a:prstGeom>
-          <a:noFill/>
-          <a:ln/>
-        </p:spPr>
-        <p:txBody>
-          <a:bodyPr wrap="square" lIns="0" tIns="0" rIns="0" bIns="0" rtlCol="0" anchor="t"/>
-          <a:lstStyle/>
-          <a:p>
-            <a:pPr algn="l" indent="0" marL="0">
-              <a:lnSpc>
-                <a:spcPts val="1820"/>
-              </a:lnSpc>
-              <a:buNone/>
-            </a:pPr>
-            <a:r>
-              <a:rPr lang="en-US" sz="1400" b="1" dirty="0">
-                <a:solidFill>
-                  <a:srgbClr val="FFFFFF"/>
-                </a:solidFill>
-                <a:latin typeface="Courier New" pitchFamily="34" charset="0"/>
-                <a:ea typeface="Courier New" pitchFamily="34" charset="-122"/>
-                <a:cs typeface="Courier New" pitchFamily="34" charset="-120"/>
-              </a:rPr>
-              <a:t>import</a:t>
-            </a:r>
-            <a:pPr algn="l" indent="0" marL="0">
-              <a:lnSpc>
-                <a:spcPts val="1820"/>
-              </a:lnSpc>
-              <a:buNone/>
-            </a:pPr>
-            <a:r>
-              <a:rPr lang="en-US" sz="1400" dirty="0">
-                <a:solidFill>
-                  <a:srgbClr val="FFFFFF"/>
-                </a:solidFill>
-                <a:latin typeface="Courier New" pitchFamily="34" charset="0"/>
-                <a:ea typeface="Courier New" pitchFamily="34" charset="-122"/>
-                <a:cs typeface="Courier New" pitchFamily="34" charset="-120"/>
-              </a:rPr>
-              <a:t> pandas </a:t>
-            </a:r>
-            <a:pPr algn="l" indent="0" marL="0">
-              <a:lnSpc>
-                <a:spcPts val="1820"/>
-              </a:lnSpc>
-              <a:buNone/>
-            </a:pPr>
-            <a:r>
-              <a:rPr lang="en-US" sz="1400" b="1" dirty="0">
-                <a:solidFill>
-                  <a:srgbClr val="FFFFFF"/>
-                </a:solidFill>
-                <a:latin typeface="Courier New" pitchFamily="34" charset="0"/>
-                <a:ea typeface="Courier New" pitchFamily="34" charset="-122"/>
-                <a:cs typeface="Courier New" pitchFamily="34" charset="-120"/>
-              </a:rPr>
-              <a:t>as</a:t>
-            </a:r>
-            <a:pPr algn="l" indent="0" marL="0">
-              <a:lnSpc>
-                <a:spcPts val="1820"/>
-              </a:lnSpc>
-              <a:buNone/>
-            </a:pPr>
-            <a:r>
-              <a:rPr lang="en-US" sz="1400" dirty="0">
-                <a:solidFill>
-                  <a:srgbClr val="FFFFFF"/>
-                </a:solidFill>
-                <a:latin typeface="Courier New" pitchFamily="34" charset="0"/>
-                <a:ea typeface="Courier New" pitchFamily="34" charset="-122"/>
-                <a:cs typeface="Courier New" pitchFamily="34" charset="-120"/>
-              </a:rPr>
-              <a:t> pd</a:t>
-            </a:r>
-            <a:endParaRPr lang="en-US" sz="1400" dirty="0"/>
-          </a:p>
-          <a:p>
-            <a:pPr algn="l" indent="0" marL="0">
-              <a:lnSpc>
-                <a:spcPts val="1820"/>
-              </a:lnSpc>
-              <a:buNone/>
-            </a:pPr>
-            <a:r>
-              <a:rPr lang="en-US" sz="1400" dirty="0">
-                <a:solidFill>
-                  <a:srgbClr val="FFFFFF"/>
-                </a:solidFill>
-                <a:latin typeface="Courier New" pitchFamily="34" charset="0"/>
-                <a:ea typeface="Courier New" pitchFamily="34" charset="-122"/>
-                <a:cs typeface="Courier New" pitchFamily="34" charset="-120"/>
-              </a:rPr>
-              <a:t>sales = pd.DataFrame(</a:t>
-            </a:r>
-            <a:endParaRPr lang="en-US" sz="1400" dirty="0"/>
-          </a:p>
-          <a:p>
-            <a:pPr algn="l" indent="0" marL="0">
-              <a:lnSpc>
-                <a:spcPts val="1820"/>
-              </a:lnSpc>
-              <a:buNone/>
-            </a:pPr>
-            <a:r>
-              <a:rPr lang="en-US" sz="1400" dirty="0">
-                <a:solidFill>
-                  <a:srgbClr val="FFFFFF"/>
-                </a:solidFill>
-                <a:latin typeface="Courier New" pitchFamily="34" charset="0"/>
-                <a:ea typeface="Courier New" pitchFamily="34" charset="-122"/>
-                <a:cs typeface="Courier New" pitchFamily="34" charset="-120"/>
-              </a:rPr>
-              <a:t>    {</a:t>
-            </a:r>
-            <a:endParaRPr lang="en-US" sz="1400" dirty="0"/>
-          </a:p>
-          <a:p>
-            <a:pPr algn="l" indent="0" marL="0">
-              <a:lnSpc>
-                <a:spcPts val="1820"/>
-              </a:lnSpc>
-              <a:buNone/>
-            </a:pPr>
-            <a:r>
-              <a:rPr lang="en-US" sz="1400" dirty="0">
-                <a:solidFill>
-                  <a:srgbClr val="FFFFFF"/>
-                </a:solidFill>
-                <a:latin typeface="Courier New" pitchFamily="34" charset="0"/>
-                <a:ea typeface="Courier New" pitchFamily="34" charset="-122"/>
-                <a:cs typeface="Courier New" pitchFamily="34" charset="-120"/>
-              </a:rPr>
-              <a:t>        </a:t>
-            </a:r>
-            <a:pPr algn="l" indent="0" marL="0">
-              <a:lnSpc>
-                <a:spcPts val="1820"/>
-              </a:lnSpc>
-              <a:buNone/>
-            </a:pPr>
-            <a:r>
-              <a:rPr lang="en-US" sz="1400" dirty="0">
-                <a:solidFill>
-                  <a:srgbClr val="E0BE36"/>
-                </a:solidFill>
-                <a:latin typeface="Courier New" pitchFamily="34" charset="0"/>
-                <a:ea typeface="Courier New" pitchFamily="34" charset="-122"/>
-                <a:cs typeface="Courier New" pitchFamily="34" charset="-120"/>
-              </a:rPr>
-              <a:t>"item"</a:t>
-            </a:r>
-            <a:pPr algn="l" indent="0" marL="0">
-              <a:lnSpc>
-                <a:spcPts val="1820"/>
-              </a:lnSpc>
-              <a:buNone/>
-            </a:pPr>
-            <a:r>
-              <a:rPr lang="en-US" sz="1400" dirty="0">
-                <a:solidFill>
-                  <a:srgbClr val="FFFFFF"/>
-                </a:solidFill>
-                <a:latin typeface="Courier New" pitchFamily="34" charset="0"/>
-                <a:ea typeface="Courier New" pitchFamily="34" charset="-122"/>
-                <a:cs typeface="Courier New" pitchFamily="34" charset="-120"/>
-              </a:rPr>
-              <a:t>: [</a:t>
-            </a:r>
-            <a:endParaRPr lang="en-US" sz="1400" dirty="0"/>
-          </a:p>
-          <a:p>
-            <a:pPr algn="l" indent="0" marL="0">
-              <a:lnSpc>
-                <a:spcPts val="1820"/>
-              </a:lnSpc>
-              <a:buNone/>
-            </a:pPr>
-            <a:r>
-              <a:rPr lang="en-US" sz="1400" dirty="0">
-                <a:solidFill>
-                  <a:srgbClr val="FFFFFF"/>
-                </a:solidFill>
-                <a:latin typeface="Courier New" pitchFamily="34" charset="0"/>
-                <a:ea typeface="Courier New" pitchFamily="34" charset="-122"/>
-                <a:cs typeface="Courier New" pitchFamily="34" charset="-120"/>
-              </a:rPr>
-              <a:t>            </a:t>
-            </a:r>
-            <a:pPr algn="l" indent="0" marL="0">
-              <a:lnSpc>
-                <a:spcPts val="1820"/>
-              </a:lnSpc>
-              <a:buNone/>
-            </a:pPr>
-            <a:r>
-              <a:rPr lang="en-US" sz="1400" dirty="0">
-                <a:solidFill>
-                  <a:srgbClr val="E0BE36"/>
-                </a:solidFill>
-                <a:latin typeface="Courier New" pitchFamily="34" charset="0"/>
-                <a:ea typeface="Courier New" pitchFamily="34" charset="-122"/>
-                <a:cs typeface="Courier New" pitchFamily="34" charset="-120"/>
-              </a:rPr>
-              <a:t>"Book"</a:t>
-            </a:r>
-            <a:pPr algn="l" indent="0" marL="0">
-              <a:lnSpc>
-                <a:spcPts val="1820"/>
-              </a:lnSpc>
-              <a:buNone/>
-            </a:pPr>
-            <a:r>
-              <a:rPr lang="en-US" sz="1400" dirty="0">
-                <a:solidFill>
-                  <a:srgbClr val="FFFFFF"/>
-                </a:solidFill>
-                <a:latin typeface="Courier New" pitchFamily="34" charset="0"/>
-                <a:ea typeface="Courier New" pitchFamily="34" charset="-122"/>
-                <a:cs typeface="Courier New" pitchFamily="34" charset="-120"/>
-              </a:rPr>
-              <a:t>, </a:t>
-            </a:r>
-            <a:pPr algn="l" indent="0" marL="0">
-              <a:lnSpc>
-                <a:spcPts val="1820"/>
-              </a:lnSpc>
-              <a:buNone/>
-            </a:pPr>
-            <a:r>
-              <a:rPr lang="en-US" sz="1400" dirty="0">
-                <a:solidFill>
-                  <a:srgbClr val="E0BE36"/>
-                </a:solidFill>
-                <a:latin typeface="Courier New" pitchFamily="34" charset="0"/>
-                <a:ea typeface="Courier New" pitchFamily="34" charset="-122"/>
-                <a:cs typeface="Courier New" pitchFamily="34" charset="-120"/>
-              </a:rPr>
-              <a:t>"Pen"</a:t>
-            </a:r>
-            <a:pPr algn="l" indent="0" marL="0">
-              <a:lnSpc>
-                <a:spcPts val="1820"/>
-              </a:lnSpc>
-              <a:buNone/>
-            </a:pPr>
-            <a:r>
-              <a:rPr lang="en-US" sz="1400" dirty="0">
-                <a:solidFill>
-                  <a:srgbClr val="FFFFFF"/>
-                </a:solidFill>
-                <a:latin typeface="Courier New" pitchFamily="34" charset="0"/>
-                <a:ea typeface="Courier New" pitchFamily="34" charset="-122"/>
-                <a:cs typeface="Courier New" pitchFamily="34" charset="-120"/>
-              </a:rPr>
-              <a:t>, </a:t>
-            </a:r>
-            <a:pPr algn="l" indent="0" marL="0">
-              <a:lnSpc>
-                <a:spcPts val="1820"/>
-              </a:lnSpc>
-              <a:buNone/>
-            </a:pPr>
-            <a:r>
-              <a:rPr lang="en-US" sz="1400" dirty="0">
-                <a:solidFill>
-                  <a:srgbClr val="E0BE36"/>
-                </a:solidFill>
-                <a:latin typeface="Courier New" pitchFamily="34" charset="0"/>
-                <a:ea typeface="Courier New" pitchFamily="34" charset="-122"/>
-                <a:cs typeface="Courier New" pitchFamily="34" charset="-120"/>
-              </a:rPr>
-              <a:t>"Book"</a:t>
-            </a:r>
-            <a:endParaRPr lang="en-US" sz="1400" dirty="0"/>
-          </a:p>
-          <a:p>
-            <a:pPr algn="l" indent="0" marL="0">
-              <a:lnSpc>
-                <a:spcPts val="1820"/>
-              </a:lnSpc>
-              <a:buNone/>
-            </a:pPr>
-            <a:r>
-              <a:rPr lang="en-US" sz="1400" dirty="0">
-                <a:solidFill>
-                  <a:srgbClr val="FFFFFF"/>
-                </a:solidFill>
-                <a:latin typeface="Courier New" pitchFamily="34" charset="0"/>
-                <a:ea typeface="Courier New" pitchFamily="34" charset="-122"/>
-                <a:cs typeface="Courier New" pitchFamily="34" charset="-120"/>
-              </a:rPr>
-              <a:t>        ],</a:t>
-            </a:r>
-            <a:endParaRPr lang="en-US" sz="1400" dirty="0"/>
-          </a:p>
-          <a:p>
-            <a:pPr algn="l" indent="0" marL="0">
-              <a:lnSpc>
-                <a:spcPts val="1820"/>
-              </a:lnSpc>
-              <a:buNone/>
-            </a:pPr>
-            <a:r>
-              <a:rPr lang="en-US" sz="1400" dirty="0">
-                <a:solidFill>
-                  <a:srgbClr val="FFFFFF"/>
-                </a:solidFill>
-                <a:latin typeface="Courier New" pitchFamily="34" charset="0"/>
-                <a:ea typeface="Courier New" pitchFamily="34" charset="-122"/>
-                <a:cs typeface="Courier New" pitchFamily="34" charset="-120"/>
-              </a:rPr>
-              <a:t>        </a:t>
-            </a:r>
-            <a:pPr algn="l" indent="0" marL="0">
-              <a:lnSpc>
-                <a:spcPts val="1820"/>
-              </a:lnSpc>
-              <a:buNone/>
-            </a:pPr>
-            <a:r>
-              <a:rPr lang="en-US" sz="1400" dirty="0">
-                <a:solidFill>
-                  <a:srgbClr val="E0BE36"/>
-                </a:solidFill>
-                <a:latin typeface="Courier New" pitchFamily="34" charset="0"/>
-                <a:ea typeface="Courier New" pitchFamily="34" charset="-122"/>
-                <a:cs typeface="Courier New" pitchFamily="34" charset="-120"/>
-              </a:rPr>
-              <a:t>"units"</a:t>
-            </a:r>
-            <a:pPr algn="l" indent="0" marL="0">
-              <a:lnSpc>
-                <a:spcPts val="1820"/>
-              </a:lnSpc>
-              <a:buNone/>
-            </a:pPr>
-            <a:r>
-              <a:rPr lang="en-US" sz="1400" dirty="0">
-                <a:solidFill>
-                  <a:srgbClr val="FFFFFF"/>
-                </a:solidFill>
-                <a:latin typeface="Courier New" pitchFamily="34" charset="0"/>
-                <a:ea typeface="Courier New" pitchFamily="34" charset="-122"/>
-                <a:cs typeface="Courier New" pitchFamily="34" charset="-120"/>
-              </a:rPr>
-              <a:t>: [2, 5, 3]</a:t>
-            </a:r>
-            <a:endParaRPr lang="en-US" sz="1400" dirty="0"/>
-          </a:p>
-          <a:p>
-            <a:pPr algn="l" indent="0" marL="0">
-              <a:lnSpc>
-                <a:spcPts val="1820"/>
-              </a:lnSpc>
-              <a:buNone/>
-            </a:pPr>
-            <a:r>
-              <a:rPr lang="en-US" sz="1400" dirty="0">
-                <a:solidFill>
-                  <a:srgbClr val="FFFFFF"/>
-                </a:solidFill>
-                <a:latin typeface="Courier New" pitchFamily="34" charset="0"/>
-                <a:ea typeface="Courier New" pitchFamily="34" charset="-122"/>
-                <a:cs typeface="Courier New" pitchFamily="34" charset="-120"/>
-              </a:rPr>
-              <a:t>    }</a:t>
-            </a:r>
-            <a:endParaRPr lang="en-US" sz="1400" dirty="0"/>
-          </a:p>
-          <a:p>
-            <a:pPr algn="l" indent="0" marL="0">
-              <a:lnSpc>
-                <a:spcPts val="1820"/>
-              </a:lnSpc>
-              <a:buNone/>
-            </a:pPr>
-            <a:r>
-              <a:rPr lang="en-US" sz="1400" dirty="0">
-                <a:solidFill>
-                  <a:srgbClr val="FFFFFF"/>
-                </a:solidFill>
-                <a:latin typeface="Courier New" pitchFamily="34" charset="0"/>
-                <a:ea typeface="Courier New" pitchFamily="34" charset="-122"/>
-                <a:cs typeface="Courier New" pitchFamily="34" charset="-120"/>
-              </a:rPr>
-              <a:t>)</a:t>
-            </a:r>
-            <a:endParaRPr lang="en-US" sz="1400" dirty="0"/>
-          </a:p>
-          <a:p>
-            <a:pPr algn="l" indent="0" marL="0">
-              <a:lnSpc>
-                <a:spcPts val="1820"/>
-              </a:lnSpc>
-              <a:buNone/>
-            </a:pPr>
-            <a:r>
-              <a:rPr lang="en-US" sz="1400" dirty="0">
-                <a:solidFill>
-                  <a:srgbClr val="FFFFFF"/>
-                </a:solidFill>
-                <a:latin typeface="Courier New" pitchFamily="34" charset="0"/>
-                <a:ea typeface="Courier New" pitchFamily="34" charset="-122"/>
-                <a:cs typeface="Courier New" pitchFamily="34" charset="-120"/>
-              </a:rPr>
-              <a:t>print(sales)</a:t>
-            </a:r>
-            <a:endParaRPr lang="en-US" sz="1400" dirty="0"/>
-          </a:p>
-          <a:p>
-            <a:pPr algn="l" indent="0" marL="0">
-              <a:lnSpc>
-                <a:spcPts val="1820"/>
-              </a:lnSpc>
-              <a:buNone/>
-            </a:pPr>
-            <a:r>
-              <a:rPr lang="en-US" sz="1400" dirty="0">
-                <a:solidFill>
-                  <a:srgbClr val="FFFFFF"/>
-                </a:solidFill>
-                <a:latin typeface="Courier New" pitchFamily="34" charset="0"/>
-                <a:ea typeface="Courier New" pitchFamily="34" charset="-122"/>
-                <a:cs typeface="Courier New" pitchFamily="34" charset="-120"/>
-              </a:rPr>
-              <a:t>print(sales.shape)</a:t>
-            </a:r>
-            <a:endParaRPr lang="en-US" sz="1400" dirty="0"/>
-          </a:p>
-        </p:txBody>
-      </p:sp>
+        </p:nvPicPr>
+        <p:blipFill>
+          <a:blip r:embed="rId1"/>
+          <a:stretch>
+            <a:fillRect/>
+          </a:stretch>
+        </p:blipFill>
+        <p:spPr>
+          <a:xfrm>
+            <a:off x="9418320" y="2103120"/>
+            <a:ext cx="1828800" cy="1828800"/>
+          </a:xfrm>
+          <a:prstGeom prst="rect">
+            <a:avLst/>
+          </a:prstGeom>
+        </p:spPr>
+      </p:pic>
       <p:sp>
         <p:nvSpPr>
           <p:cNvPr id="25" name="Slide Number Placeholder 0"/>
@@ -6263,15 +5819,15 @@
           <a:p>
             <a:pPr algn="l" indent="0" marL="0">
               <a:lnSpc>
-                <a:spcPts val="3600"/>
+                <a:spcPts val="3360"/>
               </a:lnSpc>
               <a:spcAft>
-                <a:spcPts val="2520"/>
+                <a:spcPts val="2020"/>
               </a:spcAft>
               <a:buNone/>
             </a:pPr>
             <a:r>
-              <a:rPr lang="en-US" sz="3000" dirty="0">
+              <a:rPr lang="en-US" sz="2800" dirty="0">
                 <a:solidFill>
                   <a:srgbClr val="111111"/>
                 </a:solidFill>
@@ -6279,22 +5835,22 @@
                 <a:ea typeface="Lato" pitchFamily="34" charset="-122"/>
                 <a:cs typeface="Lato" pitchFamily="34" charset="-120"/>
               </a:rPr>
-              <a:t>Read synthetic_homes.csv. Show its first rows and its shape. Say what each row stands for and what unit rent_ugx is in.</a:t>
-            </a:r>
-            <a:endParaRPr lang="en-US" sz="3000" dirty="0"/>
+              <a:t>Read synthetic_homes.csv.</a:t>
+            </a:r>
+            <a:endParaRPr lang="en-US" sz="2800" dirty="0"/>
           </a:p>
           <a:p>
             <a:pPr algn="l" indent="0" marL="0">
               <a:lnSpc>
-                <a:spcPts val="3600"/>
+                <a:spcPts val="3360"/>
               </a:lnSpc>
               <a:spcAft>
-                <a:spcPts val="2520"/>
+                <a:spcPts val="2020"/>
               </a:spcAft>
               <a:buNone/>
             </a:pPr>
             <a:r>
-              <a:rPr lang="en-US" sz="3000" dirty="0">
+              <a:rPr lang="en-US" sz="2800" dirty="0">
                 <a:solidFill>
                   <a:srgbClr val="111111"/>
                 </a:solidFill>
@@ -6302,9 +5858,55 @@
                 <a:ea typeface="Lato" pitchFamily="34" charset="-122"/>
                 <a:cs typeface="Lato" pitchFamily="34" charset="-120"/>
               </a:rPr>
+              <a:t>Show its first rows and its shape.</a:t>
+            </a:r>
+            <a:endParaRPr lang="en-US" sz="2800" dirty="0"/>
+          </a:p>
+          <a:p>
+            <a:pPr algn="l" indent="0" marL="0">
+              <a:lnSpc>
+                <a:spcPts val="3360"/>
+              </a:lnSpc>
+              <a:spcAft>
+                <a:spcPts val="2020"/>
+              </a:spcAft>
+              <a:buNone/>
+            </a:pPr>
+            <a:r>
+              <a:rPr lang="en-US" sz="2800" dirty="0">
+                <a:solidFill>
+                  <a:srgbClr val="111111"/>
+                </a:solidFill>
+                <a:latin typeface="Lato" pitchFamily="34" charset="0"/>
+                <a:ea typeface="Lato" pitchFamily="34" charset="-122"/>
+                <a:cs typeface="Lato" pitchFamily="34" charset="-120"/>
+              </a:rPr>
+              <a:t>Say what each row stands for and what unit rent_ugx is in.</a:t>
+            </a:r>
+            <a:endParaRPr lang="en-US" sz="2800" dirty="0"/>
+          </a:p>
+          <a:p>
+            <a:pPr algn="l" indent="0" marL="0">
+              <a:lnSpc>
+                <a:spcPts val="3360"/>
+              </a:lnSpc>
+              <a:spcAft>
+                <a:spcPts val="2020"/>
+              </a:spcAft>
+              <a:buNone/>
+            </a:pPr>
+            <a:r>
+              <a:rPr lang="en-US" sz="2800" dirty="0">
+                <a:solidFill>
+                  <a:srgbClr val="111111"/>
+                </a:solidFill>
+                <a:latin typeface="Lato" pitchFamily="34" charset="0"/>
+                <a:ea typeface="Lato" pitchFamily="34" charset="-122"/>
+                <a:cs typeface="Lato" pitchFamily="34" charset="-120"/>
+              </a:rPr>
               <a:t>Save it as ML07. Write two sentences: what you changed and how you checked it.</a:t>
             </a:r>
-            <a:endParaRPr lang="en-US" sz="3000" dirty="0"/>
+            <a:endParaRPr lang="en-US" sz="2800" dirty="0"/>
           </a:p>
         </p:txBody>
       </p:sp>
@@ -9031,11 +8633,11 @@
         <p:spPr>
           <a:xfrm>
             <a:off x="640080" y="1645920"/>
-            <a:ext cx="10881360" cy="2618232"/>
+            <a:ext cx="10881360" cy="1561592"/>
           </a:xfrm>
           <a:prstGeom prst="roundRect">
             <a:avLst>
-              <a:gd name="adj" fmla="val 2794"/>
+              <a:gd name="adj" fmla="val 4684"/>
             </a:avLst>
           </a:prstGeom>
           <a:solidFill>
@@ -9053,7 +8655,7 @@
         <p:spPr>
           <a:xfrm>
             <a:off x="841248" y="1847088"/>
-            <a:ext cx="10479024" cy="2215896"/>
+            <a:ext cx="10479024" cy="1159256"/>
           </a:xfrm>
           <a:prstGeom prst="rect">
             <a:avLst/>
@@ -9067,12 +8669,12 @@
           <a:p>
             <a:pPr algn="l" indent="0" marL="0">
               <a:lnSpc>
-                <a:spcPts val="2860"/>
+                <a:spcPts val="2210"/>
               </a:lnSpc>
               <a:buNone/>
             </a:pPr>
             <a:r>
-              <a:rPr lang="en-US" sz="2200" b="1" dirty="0">
+              <a:rPr lang="en-US" sz="1700" b="1" dirty="0">
                 <a:solidFill>
                   <a:srgbClr val="FFFFFF"/>
                 </a:solidFill>
@@ -9084,12 +8686,12 @@
             </a:r>
             <a:pPr algn="l" indent="0" marL="0">
               <a:lnSpc>
-                <a:spcPts val="2860"/>
+                <a:spcPts val="2210"/>
               </a:lnSpc>
               <a:buNone/>
             </a:pPr>
             <a:r>
-              <a:rPr lang="en-US" sz="2200" dirty="0">
+              <a:rPr lang="en-US" sz="1700" dirty="0">
                 <a:solidFill>
                   <a:srgbClr val="FFFFFF"/>
                 </a:solidFill>
@@ -9101,12 +8703,12 @@
             </a:r>
             <a:pPr algn="l" indent="0" marL="0">
               <a:lnSpc>
-                <a:spcPts val="2860"/>
+                <a:spcPts val="2210"/>
               </a:lnSpc>
               <a:buNone/>
             </a:pPr>
             <a:r>
-              <a:rPr lang="en-US" sz="2200" b="1" dirty="0">
+              <a:rPr lang="en-US" sz="1700" b="1" dirty="0">
                 <a:solidFill>
                   <a:srgbClr val="FFFFFF"/>
                 </a:solidFill>
@@ -9118,12 +8720,12 @@
             </a:r>
             <a:pPr algn="l" indent="0" marL="0">
               <a:lnSpc>
-                <a:spcPts val="2860"/>
+                <a:spcPts val="2210"/>
               </a:lnSpc>
               <a:buNone/>
             </a:pPr>
             <a:r>
-              <a:rPr lang="en-US" sz="2200" dirty="0">
+              <a:rPr lang="en-US" sz="1700" dirty="0">
                 <a:solidFill>
                   <a:srgbClr val="FFFFFF"/>
                 </a:solidFill>
@@ -9133,17 +8735,17 @@
               </a:rPr>
               <a:t> pd</a:t>
             </a:r>
-            <a:endParaRPr lang="en-US" sz="2200" dirty="0"/>
+            <a:endParaRPr lang="en-US" sz="1700" dirty="0"/>
           </a:p>
           <a:p>
             <a:pPr algn="l" indent="0" marL="0">
               <a:lnSpc>
-                <a:spcPts val="2860"/>
+                <a:spcPts val="2210"/>
               </a:lnSpc>
               <a:buNone/>
             </a:pPr>
             <a:r>
-              <a:rPr lang="en-US" sz="2200" dirty="0">
+              <a:rPr lang="en-US" sz="1700" dirty="0">
                 <a:solidFill>
                   <a:srgbClr val="FFFFFF"/>
                 </a:solidFill>
@@ -9151,189 +8753,189 @@
                 <a:ea typeface="Courier New" pitchFamily="34" charset="-122"/>
                 <a:cs typeface="Courier New" pitchFamily="34" charset="-120"/>
               </a:rPr>
-              <a:t>sales = pd.DataFrame(</a:t>
-            </a:r>
-            <a:endParaRPr lang="en-US" sz="2200" dirty="0"/>
-          </a:p>
-          <a:p>
+              <a:t>sales = pd.DataFrame({</a:t>
+            </a:r>
             <a:pPr algn="l" indent="0" marL="0">
               <a:lnSpc>
-                <a:spcPts val="2860"/>
+                <a:spcPts val="2210"/>
               </a:lnSpc>
               <a:buNone/>
             </a:pPr>
             <a:r>
-              <a:rPr lang="en-US" sz="2200" dirty="0">
-                <a:solidFill>
-                  <a:srgbClr val="FFFFFF"/>
+              <a:rPr lang="en-US" sz="1700" dirty="0">
+                <a:solidFill>
+                  <a:srgbClr val="E0BE36"/>
                 </a:solidFill>
                 <a:latin typeface="Courier New" pitchFamily="34" charset="0"/>
                 <a:ea typeface="Courier New" pitchFamily="34" charset="-122"/>
                 <a:cs typeface="Courier New" pitchFamily="34" charset="-120"/>
               </a:rPr>
-              <a:t>    {</a:t>
+              <a:t>"item"</a:t>
             </a:r>
             <a:pPr algn="l" indent="0" marL="0">
               <a:lnSpc>
-                <a:spcPts val="2860"/>
+                <a:spcPts val="2210"/>
               </a:lnSpc>
               <a:buNone/>
             </a:pPr>
             <a:r>
-              <a:rPr lang="en-US" sz="2200" dirty="0">
-                <a:solidFill>
-                  <a:srgbClr val="E0BE36"/>
+              <a:rPr lang="en-US" sz="1700" dirty="0">
+                <a:solidFill>
+                  <a:srgbClr val="FFFFFF"/>
                 </a:solidFill>
                 <a:latin typeface="Courier New" pitchFamily="34" charset="0"/>
                 <a:ea typeface="Courier New" pitchFamily="34" charset="-122"/>
                 <a:cs typeface="Courier New" pitchFamily="34" charset="-120"/>
               </a:rPr>
-              <a:t>"item"</a:t>
+              <a:t>: [</a:t>
             </a:r>
             <a:pPr algn="l" indent="0" marL="0">
               <a:lnSpc>
-                <a:spcPts val="2860"/>
+                <a:spcPts val="2210"/>
               </a:lnSpc>
               <a:buNone/>
             </a:pPr>
             <a:r>
-              <a:rPr lang="en-US" sz="2200" dirty="0">
-                <a:solidFill>
-                  <a:srgbClr val="FFFFFF"/>
+              <a:rPr lang="en-US" sz="1700" dirty="0">
+                <a:solidFill>
+                  <a:srgbClr val="E0BE36"/>
                 </a:solidFill>
                 <a:latin typeface="Courier New" pitchFamily="34" charset="0"/>
                 <a:ea typeface="Courier New" pitchFamily="34" charset="-122"/>
                 <a:cs typeface="Courier New" pitchFamily="34" charset="-120"/>
               </a:rPr>
-              <a:t>: [</a:t>
+              <a:t>"Book"</a:t>
             </a:r>
             <a:pPr algn="l" indent="0" marL="0">
               <a:lnSpc>
-                <a:spcPts val="2860"/>
+                <a:spcPts val="2210"/>
               </a:lnSpc>
               <a:buNone/>
             </a:pPr>
             <a:r>
-              <a:rPr lang="en-US" sz="2200" dirty="0">
-                <a:solidFill>
-                  <a:srgbClr val="E0BE36"/>
+              <a:rPr lang="en-US" sz="1700" dirty="0">
+                <a:solidFill>
+                  <a:srgbClr val="FFFFFF"/>
                 </a:solidFill>
                 <a:latin typeface="Courier New" pitchFamily="34" charset="0"/>
                 <a:ea typeface="Courier New" pitchFamily="34" charset="-122"/>
                 <a:cs typeface="Courier New" pitchFamily="34" charset="-120"/>
               </a:rPr>
-              <a:t>"Book"</a:t>
+              <a:t>, </a:t>
             </a:r>
             <a:pPr algn="l" indent="0" marL="0">
               <a:lnSpc>
-                <a:spcPts val="2860"/>
+                <a:spcPts val="2210"/>
               </a:lnSpc>
               <a:buNone/>
             </a:pPr>
             <a:r>
-              <a:rPr lang="en-US" sz="2200" dirty="0">
-                <a:solidFill>
-                  <a:srgbClr val="FFFFFF"/>
+              <a:rPr lang="en-US" sz="1700" dirty="0">
+                <a:solidFill>
+                  <a:srgbClr val="E0BE36"/>
                 </a:solidFill>
                 <a:latin typeface="Courier New" pitchFamily="34" charset="0"/>
                 <a:ea typeface="Courier New" pitchFamily="34" charset="-122"/>
                 <a:cs typeface="Courier New" pitchFamily="34" charset="-120"/>
               </a:rPr>
-              <a:t>, </a:t>
+              <a:t>"Pen"</a:t>
             </a:r>
             <a:pPr algn="l" indent="0" marL="0">
               <a:lnSpc>
-                <a:spcPts val="2860"/>
+                <a:spcPts val="2210"/>
               </a:lnSpc>
               <a:buNone/>
             </a:pPr>
             <a:r>
-              <a:rPr lang="en-US" sz="2200" dirty="0">
-                <a:solidFill>
-                  <a:srgbClr val="E0BE36"/>
+              <a:rPr lang="en-US" sz="1700" dirty="0">
+                <a:solidFill>
+                  <a:srgbClr val="FFFFFF"/>
                 </a:solidFill>
                 <a:latin typeface="Courier New" pitchFamily="34" charset="0"/>
                 <a:ea typeface="Courier New" pitchFamily="34" charset="-122"/>
                 <a:cs typeface="Courier New" pitchFamily="34" charset="-120"/>
               </a:rPr>
-              <a:t>"Pen"</a:t>
+              <a:t>, </a:t>
             </a:r>
             <a:pPr algn="l" indent="0" marL="0">
               <a:lnSpc>
-                <a:spcPts val="2860"/>
+                <a:spcPts val="2210"/>
               </a:lnSpc>
               <a:buNone/>
             </a:pPr>
             <a:r>
-              <a:rPr lang="en-US" sz="2200" dirty="0">
-                <a:solidFill>
-                  <a:srgbClr val="FFFFFF"/>
+              <a:rPr lang="en-US" sz="1700" dirty="0">
+                <a:solidFill>
+                  <a:srgbClr val="E0BE36"/>
                 </a:solidFill>
                 <a:latin typeface="Courier New" pitchFamily="34" charset="0"/>
                 <a:ea typeface="Courier New" pitchFamily="34" charset="-122"/>
                 <a:cs typeface="Courier New" pitchFamily="34" charset="-120"/>
               </a:rPr>
-              <a:t>, </a:t>
+              <a:t>"Book"</a:t>
             </a:r>
             <a:pPr algn="l" indent="0" marL="0">
               <a:lnSpc>
-                <a:spcPts val="2860"/>
+                <a:spcPts val="2210"/>
               </a:lnSpc>
               <a:buNone/>
             </a:pPr>
             <a:r>
-              <a:rPr lang="en-US" sz="2200" dirty="0">
-                <a:solidFill>
-                  <a:srgbClr val="E0BE36"/>
+              <a:rPr lang="en-US" sz="1700" dirty="0">
+                <a:solidFill>
+                  <a:srgbClr val="FFFFFF"/>
                 </a:solidFill>
                 <a:latin typeface="Courier New" pitchFamily="34" charset="0"/>
                 <a:ea typeface="Courier New" pitchFamily="34" charset="-122"/>
                 <a:cs typeface="Courier New" pitchFamily="34" charset="-120"/>
               </a:rPr>
-              <a:t>"Book"</a:t>
+              <a:t>], </a:t>
             </a:r>
             <a:pPr algn="l" indent="0" marL="0">
               <a:lnSpc>
-                <a:spcPts val="2860"/>
+                <a:spcPts val="2210"/>
               </a:lnSpc>
               <a:buNone/>
             </a:pPr>
             <a:r>
-              <a:rPr lang="en-US" sz="2200" dirty="0">
-                <a:solidFill>
-                  <a:srgbClr val="FFFFFF"/>
+              <a:rPr lang="en-US" sz="1700" dirty="0">
+                <a:solidFill>
+                  <a:srgbClr val="E0BE36"/>
                 </a:solidFill>
                 <a:latin typeface="Courier New" pitchFamily="34" charset="0"/>
                 <a:ea typeface="Courier New" pitchFamily="34" charset="-122"/>
                 <a:cs typeface="Courier New" pitchFamily="34" charset="-120"/>
               </a:rPr>
-              <a:t>], </a:t>
+              <a:t>"units"</a:t>
             </a:r>
             <a:pPr algn="l" indent="0" marL="0">
               <a:lnSpc>
-                <a:spcPts val="2860"/>
+                <a:spcPts val="2210"/>
               </a:lnSpc>
               <a:buNone/>
             </a:pPr>
             <a:r>
-              <a:rPr lang="en-US" sz="2200" dirty="0">
-                <a:solidFill>
-                  <a:srgbClr val="E0BE36"/>
+              <a:rPr lang="en-US" sz="1700" dirty="0">
+                <a:solidFill>
+                  <a:srgbClr val="FFFFFF"/>
                 </a:solidFill>
                 <a:latin typeface="Courier New" pitchFamily="34" charset="0"/>
                 <a:ea typeface="Courier New" pitchFamily="34" charset="-122"/>
                 <a:cs typeface="Courier New" pitchFamily="34" charset="-120"/>
               </a:rPr>
-              <a:t>"units"</a:t>
-            </a:r>
+              <a:t>: [2, 5, 3]})</a:t>
+            </a:r>
+            <a:endParaRPr lang="en-US" sz="1700" dirty="0"/>
+          </a:p>
+          <a:p>
             <a:pPr algn="l" indent="0" marL="0">
               <a:lnSpc>
-                <a:spcPts val="2860"/>
+                <a:spcPts val="2210"/>
               </a:lnSpc>
               <a:buNone/>
             </a:pPr>
             <a:r>
-              <a:rPr lang="en-US" sz="2200" dirty="0">
+              <a:rPr lang="en-US" sz="1700" dirty="0">
                 <a:solidFill>
                   <a:srgbClr val="FFFFFF"/>
                 </a:solidFill>
@@ -9341,19 +8943,19 @@
                 <a:ea typeface="Courier New" pitchFamily="34" charset="-122"/>
                 <a:cs typeface="Courier New" pitchFamily="34" charset="-120"/>
               </a:rPr>
-              <a:t>: [2, 5, 3]}</a:t>
-            </a:r>
-            <a:endParaRPr lang="en-US" sz="2200" dirty="0"/>
+              <a:t>print(sales)</a:t>
+            </a:r>
+            <a:endParaRPr lang="en-US" sz="1700" dirty="0"/>
           </a:p>
           <a:p>
             <a:pPr algn="l" indent="0" marL="0">
               <a:lnSpc>
-                <a:spcPts val="2860"/>
+                <a:spcPts val="2210"/>
               </a:lnSpc>
               <a:buNone/>
             </a:pPr>
             <a:r>
-              <a:rPr lang="en-US" sz="2200" dirty="0">
+              <a:rPr lang="en-US" sz="1700" dirty="0">
                 <a:solidFill>
                   <a:srgbClr val="FFFFFF"/>
                 </a:solidFill>
@@ -9361,49 +8963,9 @@
                 <a:ea typeface="Courier New" pitchFamily="34" charset="-122"/>
                 <a:cs typeface="Courier New" pitchFamily="34" charset="-120"/>
               </a:rPr>
-              <a:t>)</a:t>
-            </a:r>
-            <a:endParaRPr lang="en-US" sz="2200" dirty="0"/>
-          </a:p>
-          <a:p>
-            <a:pPr algn="l" indent="0" marL="0">
-              <a:lnSpc>
-                <a:spcPts val="2860"/>
-              </a:lnSpc>
-              <a:buNone/>
-            </a:pPr>
-            <a:r>
-              <a:rPr lang="en-US" sz="2200" dirty="0">
-                <a:solidFill>
-                  <a:srgbClr val="FFFFFF"/>
-                </a:solidFill>
-                <a:latin typeface="Courier New" pitchFamily="34" charset="0"/>
-                <a:ea typeface="Courier New" pitchFamily="34" charset="-122"/>
-                <a:cs typeface="Courier New" pitchFamily="34" charset="-120"/>
-              </a:rPr>
-              <a:t>print(sales)</a:t>
-            </a:r>
-            <a:endParaRPr lang="en-US" sz="2200" dirty="0"/>
-          </a:p>
-          <a:p>
-            <a:pPr algn="l" indent="0" marL="0">
-              <a:lnSpc>
-                <a:spcPts val="2860"/>
-              </a:lnSpc>
-              <a:buNone/>
-            </a:pPr>
-            <a:r>
-              <a:rPr lang="en-US" sz="2200" dirty="0">
-                <a:solidFill>
-                  <a:srgbClr val="FFFFFF"/>
-                </a:solidFill>
-                <a:latin typeface="Courier New" pitchFamily="34" charset="0"/>
-                <a:ea typeface="Courier New" pitchFamily="34" charset="-122"/>
-                <a:cs typeface="Courier New" pitchFamily="34" charset="-120"/>
-              </a:rPr>
               <a:t>print(sales.shape)</a:t>
             </a:r>
-            <a:endParaRPr lang="en-US" sz="2200" dirty="0"/>
+            <a:endParaRPr lang="en-US" sz="1700" dirty="0"/>
           </a:p>
         </p:txBody>
       </p:sp>
@@ -9415,8 +8977,8 @@
         </p:nvSpPr>
         <p:spPr>
           <a:xfrm>
-            <a:off x="640080" y="4447032"/>
-            <a:ext cx="8046720" cy="1816608"/>
+            <a:off x="640080" y="3390392"/>
+            <a:ext cx="8046720" cy="2873248"/>
           </a:xfrm>
           <a:prstGeom prst="rect">
             <a:avLst/>
